--- a/assets/figures-editable/appendix-studies/a-e23.pptx
+++ b/assets/figures-editable/appendix-studies/a-e23.pptx
@@ -7,7 +7,7 @@
   <p:sldIdLst>
     <p:sldId id="256" r:id="rId7"/>
   </p:sldIdLst>
-  <p:sldSz cx="8961120" cy="5239512" type="screen4x3"/>
+  <p:sldSz cx="12191695" cy="6858000" type="screen4x3"/>
   <p:notesSz cx="6858000" cy="9144000"/>
   <p:defaultTextStyle>
     <a:defPPr>
@@ -3098,14 +3098,14 @@
       <p:grpSpPr/>
       <p:sp>
         <p:nvSpPr>
-          <p:cNvPr id="2" name="text 0" descr="sci-ppt:obj-000"/>
+          <p:cNvPr id="2" name="A-E23 text 0" descr="sci-ppt:o000"/>
           <p:cNvSpPr txBox="1"/>
           <p:nvPr/>
         </p:nvSpPr>
         <p:spPr>
           <a:xfrm>
-            <a:off x="256032" y="137160"/>
-            <a:ext cx="7315200" cy="310896"/>
+            <a:off x="274320" y="118872"/>
+            <a:ext cx="11612880" cy="340105"/>
           </a:xfrm>
           <a:prstGeom prst="rect">
             <a:avLst/>
@@ -3114,7 +3114,7 @@
           <a:effectLst/>
         </p:spPr>
         <p:txBody>
-          <a:bodyPr wrap="none" lIns="0" rIns="0" tIns="0" bIns="0" anchor="ctr">
+          <a:bodyPr wrap="none" lIns="18288" rIns="18288" tIns="18288" bIns="18288" anchor="t">
             <a:spAutoFit/>
           </a:bodyPr>
           <a:lstStyle/>
@@ -3125,27 +3125,27 @@
               </a:spcAft>
             </a:pPr>
             <a:r>
-              <a:rPr sz="1439" b="0" i="0">
+              <a:rPr sz="1900" b="1" i="0">
                 <a:solidFill>
                   <a:srgbClr val="8EDBD4"/>
                 </a:solidFill>
                 <a:latin typeface="Arial"/>
               </a:rPr>
-              <a:t>A-E23 · Physical variable map</a:t>
-            </a:r>
-          </a:p>
-        </p:txBody>
-      </p:sp>
-      <p:sp>
-        <p:nvSpPr>
-          <p:cNvPr id="3" name="text 1" descr="sci-ppt:obj-001"/>
+              <a:t>A-E23 · Original event-response formulas recalled</a:t>
+            </a:r>
+          </a:p>
+        </p:txBody>
+      </p:sp>
+      <p:sp>
+        <p:nvSpPr>
+          <p:cNvPr id="3" name="A-E23 text 1" descr="sci-ppt:o001"/>
           <p:cNvSpPr txBox="1"/>
           <p:nvPr/>
         </p:nvSpPr>
         <p:spPr>
           <a:xfrm>
-            <a:off x="905256" y="612648"/>
-            <a:ext cx="7498079" cy="310896"/>
+            <a:off x="457200" y="914400"/>
+            <a:ext cx="11247120" cy="254889"/>
           </a:xfrm>
           <a:prstGeom prst="rect">
             <a:avLst/>
@@ -3154,7 +3154,7 @@
           <a:effectLst/>
         </p:spPr>
         <p:txBody>
-          <a:bodyPr wrap="none" lIns="0" rIns="0" tIns="0" bIns="0" anchor="ctr">
+          <a:bodyPr wrap="none" lIns="18288" rIns="18288" tIns="18288" bIns="18288" anchor="t">
             <a:spAutoFit/>
           </a:bodyPr>
           <a:lstStyle/>
@@ -3165,37 +3165,37 @@
               </a:spcAft>
             </a:pPr>
             <a:r>
-              <a:rPr sz="1296" b="0" i="0">
+              <a:rPr sz="1350" b="1" i="0">
                 <a:solidFill>
-                  <a:srgbClr val="E7F0F3"/>
+                  <a:srgbClr val="8EDBD4"/>
                 </a:solidFill>
                 <a:latin typeface="Arial"/>
               </a:rPr>
-              <a:t>Response times and dimensionless comparisons</a:t>
-            </a:r>
-          </a:p>
-        </p:txBody>
-      </p:sp>
-      <p:sp>
-        <p:nvSpPr>
-          <p:cNvPr id="4" name="rect 2" descr="sci-ppt:obj-002"/>
+              <a:t>Three timescale comparisons, three assumptions</a:t>
+            </a:r>
+          </a:p>
+        </p:txBody>
+      </p:sp>
+      <p:sp>
+        <p:nvSpPr>
+          <p:cNvPr id="4" name="A-E23 round_rect 2" descr="sci-ppt:o002"/>
           <p:cNvSpPr/>
           <p:nvPr/>
         </p:nvSpPr>
         <p:spPr>
           <a:xfrm>
-            <a:off x="996696" y="1069848"/>
-            <a:ext cx="6766560" cy="347472"/>
+            <a:off x="457200" y="1371600"/>
+            <a:ext cx="3611880" cy="3108960"/>
           </a:xfrm>
-          <a:prstGeom prst="rect">
+          <a:prstGeom prst="roundRect">
             <a:avLst/>
           </a:prstGeom>
           <a:solidFill>
             <a:srgbClr val="213E4B"/>
           </a:solidFill>
-          <a:ln w="17780">
+          <a:ln w="20320">
             <a:solidFill>
-              <a:srgbClr val="B4C7D2"/>
+              <a:srgbClr val="7FC8F8"/>
             </a:solidFill>
           </a:ln>
           <a:effectLst/>
@@ -3210,14 +3210,14 @@
       </p:sp>
       <p:sp>
         <p:nvSpPr>
-          <p:cNvPr id="5" name="text 3" descr="sci-ppt:obj-003"/>
+          <p:cNvPr id="5" name="A-E23 text 3" descr="sci-ppt:o003"/>
           <p:cNvSpPr txBox="1"/>
           <p:nvPr/>
         </p:nvSpPr>
         <p:spPr>
           <a:xfrm>
-            <a:off x="1179576" y="1106424"/>
-            <a:ext cx="6492240" cy="310896"/>
+            <a:off x="566928" y="1426464"/>
+            <a:ext cx="3392424" cy="254889"/>
           </a:xfrm>
           <a:prstGeom prst="rect">
             <a:avLst/>
@@ -3226,7 +3226,7 @@
           <a:effectLst/>
         </p:spPr>
         <p:txBody>
-          <a:bodyPr wrap="none" lIns="0" rIns="0" tIns="0" bIns="0" anchor="ctr">
+          <a:bodyPr wrap="none" lIns="18288" rIns="18288" tIns="18288" bIns="18288" anchor="t">
             <a:spAutoFit/>
           </a:bodyPr>
           <a:lstStyle/>
@@ -3237,59 +3237,27 @@
               </a:spcAft>
             </a:pPr>
             <a:r>
-              <a:rPr sz="1296" b="0" i="0">
+              <a:rPr sz="1350" b="1" i="0">
                 <a:solidFill>
-                  <a:srgbClr val="E7F0F3"/>
+                  <a:srgbClr val="7FC8F8"/>
                 </a:solidFill>
                 <a:latin typeface="Arial"/>
               </a:rPr>
-              <a:t>De = τrel / τe</a:t>
-            </a:r>
-          </a:p>
-        </p:txBody>
-      </p:sp>
-      <p:sp>
-        <p:nvSpPr>
-          <p:cNvPr id="6" name="rect 4" descr="sci-ppt:obj-004"/>
-          <p:cNvSpPr/>
+              <a:t>Deborah number</a:t>
+            </a:r>
+          </a:p>
+        </p:txBody>
+      </p:sp>
+      <p:sp>
+        <p:nvSpPr>
+          <p:cNvPr id="6" name="A-E23 text 4" descr="sci-ppt:o004"/>
+          <p:cNvSpPr txBox="1"/>
           <p:nvPr/>
         </p:nvSpPr>
         <p:spPr>
           <a:xfrm>
-            <a:off x="996696" y="1645920"/>
-            <a:ext cx="6766560" cy="347472"/>
-          </a:xfrm>
-          <a:prstGeom prst="rect">
-            <a:avLst/>
-          </a:prstGeom>
-          <a:solidFill>
-            <a:srgbClr val="213E4B"/>
-          </a:solidFill>
-          <a:ln w="17780">
-            <a:solidFill>
-              <a:srgbClr val="B4C7D2"/>
-            </a:solidFill>
-          </a:ln>
-          <a:effectLst/>
-        </p:spPr>
-        <p:txBody>
-          <a:bodyPr rtlCol="0" anchor="ctr"/>
-          <a:lstStyle/>
-          <a:p>
-            <a:pPr algn="ctr"/>
-          </a:p>
-        </p:txBody>
-      </p:sp>
-      <p:sp>
-        <p:nvSpPr>
-          <p:cNvPr id="7" name="text 5" descr="sci-ppt:obj-005"/>
-          <p:cNvSpPr txBox="1"/>
-          <p:nvPr/>
-        </p:nvSpPr>
-        <p:spPr>
-          <a:xfrm>
-            <a:off x="1179576" y="1682496"/>
-            <a:ext cx="6492240" cy="310896"/>
+            <a:off x="548640" y="1920240"/>
+            <a:ext cx="3429000" cy="231648"/>
           </a:xfrm>
           <a:prstGeom prst="rect">
             <a:avLst/>
@@ -3298,70 +3266,38 @@
           <a:effectLst/>
         </p:spPr>
         <p:txBody>
-          <a:bodyPr wrap="none" lIns="0" rIns="0" tIns="0" bIns="0" anchor="ctr">
+          <a:bodyPr wrap="none" lIns="18288" rIns="18288" tIns="18288" bIns="18288" anchor="t">
             <a:spAutoFit/>
           </a:bodyPr>
           <a:lstStyle/>
           <a:p>
-            <a:pPr algn="l">
+            <a:pPr algn="ctr">
               <a:spcAft>
                 <a:spcPts val="0"/>
               </a:spcAft>
             </a:pPr>
             <a:r>
-              <a:rPr sz="1296" b="0" i="0">
+              <a:rPr sz="1200" b="1" i="0">
                 <a:solidFill>
                   <a:srgbClr val="E7F0F3"/>
                 </a:solidFill>
                 <a:latin typeface="Arial"/>
               </a:rPr>
-              <a:t>ts = Lg √(ρg / Gg)</a:t>
-            </a:r>
-          </a:p>
-        </p:txBody>
-      </p:sp>
-      <p:sp>
-        <p:nvSpPr>
-          <p:cNvPr id="8" name="rect 6" descr="sci-ppt:obj-006"/>
-          <p:cNvSpPr/>
+              <a:t>De = τᵣₑₗ / τₑ</a:t>
+            </a:r>
+          </a:p>
+        </p:txBody>
+      </p:sp>
+      <p:sp>
+        <p:nvSpPr>
+          <p:cNvPr id="7" name="A-E23 text 5" descr="sci-ppt:o005"/>
+          <p:cNvSpPr txBox="1"/>
           <p:nvPr/>
         </p:nvSpPr>
         <p:spPr>
           <a:xfrm>
-            <a:off x="996696" y="2221992"/>
-            <a:ext cx="6766560" cy="347472"/>
-          </a:xfrm>
-          <a:prstGeom prst="rect">
-            <a:avLst/>
-          </a:prstGeom>
-          <a:solidFill>
-            <a:srgbClr val="213E4B"/>
-          </a:solidFill>
-          <a:ln w="17780">
-            <a:solidFill>
-              <a:srgbClr val="B4C7D2"/>
-            </a:solidFill>
-          </a:ln>
-          <a:effectLst/>
-        </p:spPr>
-        <p:txBody>
-          <a:bodyPr rtlCol="0" anchor="ctr"/>
-          <a:lstStyle/>
-          <a:p>
-            <a:pPr algn="ctr"/>
-          </a:p>
-        </p:txBody>
-      </p:sp>
-      <p:sp>
-        <p:nvSpPr>
-          <p:cNvPr id="9" name="text 7" descr="sci-ppt:obj-007"/>
-          <p:cNvSpPr txBox="1"/>
-          <p:nvPr/>
-        </p:nvSpPr>
-        <p:spPr>
-          <a:xfrm>
-            <a:off x="1179576" y="2258568"/>
-            <a:ext cx="6492240" cy="310896"/>
+            <a:off x="548640" y="2926080"/>
+            <a:ext cx="3429000" cy="231648"/>
           </a:xfrm>
           <a:prstGeom prst="rect">
             <a:avLst/>
@@ -3370,38 +3306,38 @@
           <a:effectLst/>
         </p:spPr>
         <p:txBody>
-          <a:bodyPr wrap="none" lIns="0" rIns="0" tIns="0" bIns="0" anchor="ctr">
+          <a:bodyPr wrap="none" lIns="18288" rIns="18288" tIns="18288" bIns="18288" anchor="t">
             <a:spAutoFit/>
           </a:bodyPr>
           <a:lstStyle/>
           <a:p>
-            <a:pPr algn="l">
+            <a:pPr algn="ctr">
               <a:spcAft>
                 <a:spcPts val="0"/>
               </a:spcAft>
             </a:pPr>
             <a:r>
-              <a:rPr sz="1296" b="0" i="0">
+              <a:rPr sz="1200" b="0" i="0">
                 <a:solidFill>
-                  <a:srgbClr val="E7F0F3"/>
+                  <a:srgbClr val="F2B880"/>
                 </a:solidFill>
                 <a:latin typeface="Arial"/>
               </a:rPr>
-              <a:t>tporo ≈ μl Lg² / (kperm Md)</a:t>
-            </a:r>
-          </a:p>
-        </p:txBody>
-      </p:sp>
-      <p:sp>
-        <p:nvSpPr>
-          <p:cNvPr id="10" name="text 8" descr="sci-ppt:obj-008"/>
+              <a:t>does the network relax during the event?</a:t>
+            </a:r>
+          </a:p>
+        </p:txBody>
+      </p:sp>
+      <p:sp>
+        <p:nvSpPr>
+          <p:cNvPr id="8" name="A-E23 text 6" descr="sci-ppt:o006"/>
           <p:cNvSpPr txBox="1"/>
           <p:nvPr/>
         </p:nvSpPr>
         <p:spPr>
           <a:xfrm>
-            <a:off x="1005840" y="2862072"/>
-            <a:ext cx="7680960" cy="310896"/>
+            <a:off x="548640" y="3749039"/>
+            <a:ext cx="3429000" cy="223900"/>
           </a:xfrm>
           <a:prstGeom prst="rect">
             <a:avLst/>
@@ -3410,38 +3346,70 @@
           <a:effectLst/>
         </p:spPr>
         <p:txBody>
-          <a:bodyPr wrap="none" lIns="0" rIns="0" tIns="0" bIns="0" anchor="ctr">
+          <a:bodyPr wrap="none" lIns="18288" rIns="18288" tIns="18288" bIns="18288" anchor="t">
             <a:spAutoFit/>
           </a:bodyPr>
           <a:lstStyle/>
           <a:p>
-            <a:pPr algn="l">
+            <a:pPr algn="ctr">
               <a:spcAft>
                 <a:spcPts val="0"/>
               </a:spcAft>
             </a:pPr>
             <a:r>
-              <a:rPr sz="1152" b="0" i="0">
+              <a:rPr sz="1150" b="0" i="0">
                 <a:solidFill>
-                  <a:srgbClr val="E7F0F3"/>
+                  <a:srgbClr val="B4C7D2"/>
                 </a:solidFill>
                 <a:latin typeface="Arial"/>
               </a:rPr>
-              <a:t>Equal boxes list definitions; lengths do not encode time</a:t>
-            </a:r>
-          </a:p>
-        </p:txBody>
-      </p:sp>
-      <p:sp>
-        <p:nvSpPr>
-          <p:cNvPr id="11" name="text 9" descr="sci-ppt:obj-009"/>
+              <a:t>viscoelastic response</a:t>
+            </a:r>
+          </a:p>
+        </p:txBody>
+      </p:sp>
+      <p:sp>
+        <p:nvSpPr>
+          <p:cNvPr id="9" name="A-E23 round_rect 7" descr="sci-ppt:o007"/>
+          <p:cNvSpPr/>
+          <p:nvPr/>
+        </p:nvSpPr>
+        <p:spPr>
+          <a:xfrm>
+            <a:off x="4251960" y="1371600"/>
+            <a:ext cx="3611880" cy="3108960"/>
+          </a:xfrm>
+          <a:prstGeom prst="roundRect">
+            <a:avLst/>
+          </a:prstGeom>
+          <a:solidFill>
+            <a:srgbClr val="213E4B"/>
+          </a:solidFill>
+          <a:ln w="20320">
+            <a:solidFill>
+              <a:srgbClr val="F2B880"/>
+            </a:solidFill>
+          </a:ln>
+          <a:effectLst/>
+        </p:spPr>
+        <p:txBody>
+          <a:bodyPr rtlCol="0" anchor="ctr"/>
+          <a:lstStyle/>
+          <a:p>
+            <a:pPr algn="ctr"/>
+          </a:p>
+        </p:txBody>
+      </p:sp>
+      <p:sp>
+        <p:nvSpPr>
+          <p:cNvPr id="10" name="A-E23 text 8" descr="sci-ppt:o008"/>
           <p:cNvSpPr txBox="1"/>
           <p:nvPr/>
         </p:nvSpPr>
         <p:spPr>
           <a:xfrm>
-            <a:off x="256032" y="3465576"/>
-            <a:ext cx="7315200" cy="310896"/>
+            <a:off x="4361688" y="1426464"/>
+            <a:ext cx="3392424" cy="254889"/>
           </a:xfrm>
           <a:prstGeom prst="rect">
             <a:avLst/>
@@ -3450,7 +3418,7 @@
           <a:effectLst/>
         </p:spPr>
         <p:txBody>
-          <a:bodyPr wrap="none" lIns="0" rIns="0" tIns="0" bIns="0" anchor="ctr">
+          <a:bodyPr wrap="none" lIns="18288" rIns="18288" tIns="18288" bIns="18288" anchor="t">
             <a:spAutoFit/>
           </a:bodyPr>
           <a:lstStyle/>
@@ -3461,27 +3429,27 @@
               </a:spcAft>
             </a:pPr>
             <a:r>
-              <a:rPr sz="1296" b="0" i="0">
+              <a:rPr sz="1350" b="1" i="0">
                 <a:solidFill>
-                  <a:srgbClr val="8EDBD4"/>
+                  <a:srgbClr val="F2B880"/>
                 </a:solidFill>
                 <a:latin typeface="Arial"/>
               </a:rPr>
-              <a:t>Variables and physical limits</a:t>
-            </a:r>
-          </a:p>
-        </p:txBody>
-      </p:sp>
-      <p:sp>
-        <p:nvSpPr>
-          <p:cNvPr id="12" name="text 10" descr="sci-ppt:obj-010"/>
+              <a:t>Shear crossing</a:t>
+            </a:r>
+          </a:p>
+        </p:txBody>
+      </p:sp>
+      <p:sp>
+        <p:nvSpPr>
+          <p:cNvPr id="11" name="A-E23 text 9" descr="sci-ppt:o009"/>
           <p:cNvSpPr txBox="1"/>
           <p:nvPr/>
         </p:nvSpPr>
         <p:spPr>
           <a:xfrm>
-            <a:off x="365760" y="3813048"/>
-            <a:ext cx="8412480" cy="310896"/>
+            <a:off x="4343400" y="1920240"/>
+            <a:ext cx="3429000" cy="231648"/>
           </a:xfrm>
           <a:prstGeom prst="rect">
             <a:avLst/>
@@ -3490,38 +3458,38 @@
           <a:effectLst/>
         </p:spPr>
         <p:txBody>
-          <a:bodyPr wrap="none" lIns="0" rIns="0" tIns="0" bIns="0" anchor="ctr">
+          <a:bodyPr wrap="none" lIns="18288" rIns="18288" tIns="18288" bIns="18288" anchor="t">
             <a:spAutoFit/>
           </a:bodyPr>
           <a:lstStyle/>
           <a:p>
-            <a:pPr algn="l">
+            <a:pPr algn="ctr">
               <a:spcAft>
                 <a:spcPts val="0"/>
               </a:spcAft>
             </a:pPr>
             <a:r>
-              <a:rPr sz="1152" b="0" i="0">
+              <a:rPr sz="1200" b="1" i="0">
                 <a:solidFill>
                   <a:srgbClr val="E7F0F3"/>
                 </a:solidFill>
                 <a:latin typeface="Arial"/>
               </a:rPr>
-              <a:t>• τrel/τe = De</a:t>
-            </a:r>
-          </a:p>
-        </p:txBody>
-      </p:sp>
-      <p:sp>
-        <p:nvSpPr>
-          <p:cNvPr id="13" name="text 11" descr="sci-ppt:obj-011"/>
+              <a:t>tₛ = L_g / √(G_g/ρ_g) = 6.71 µs</a:t>
+            </a:r>
+          </a:p>
+        </p:txBody>
+      </p:sp>
+      <p:sp>
+        <p:nvSpPr>
+          <p:cNvPr id="12" name="A-E23 text 10" descr="sci-ppt:o010"/>
           <p:cNvSpPr txBox="1"/>
           <p:nvPr/>
         </p:nvSpPr>
         <p:spPr>
           <a:xfrm>
-            <a:off x="365760" y="4023360"/>
-            <a:ext cx="8412480" cy="310896"/>
+            <a:off x="4343400" y="2926080"/>
+            <a:ext cx="3429000" cy="231648"/>
           </a:xfrm>
           <a:prstGeom prst="rect">
             <a:avLst/>
@@ -3530,38 +3498,38 @@
           <a:effectLst/>
         </p:spPr>
         <p:txBody>
-          <a:bodyPr wrap="none" lIns="0" rIns="0" tIns="0" bIns="0" anchor="ctr">
+          <a:bodyPr wrap="none" lIns="18288" rIns="18288" tIns="18288" bIns="18288" anchor="t">
             <a:spAutoFit/>
           </a:bodyPr>
           <a:lstStyle/>
           <a:p>
-            <a:pPr algn="l">
+            <a:pPr algn="ctr">
               <a:spcAft>
                 <a:spcPts val="0"/>
               </a:spcAft>
             </a:pPr>
             <a:r>
-              <a:rPr sz="1152" b="0" i="0">
+              <a:rPr sz="1200" b="0" i="0">
                 <a:solidFill>
-                  <a:srgbClr val="E7F0F3"/>
+                  <a:srgbClr val="F2B880"/>
                 </a:solidFill>
                 <a:latin typeface="Arial"/>
               </a:rPr>
-              <a:t>• Lg√(ρg/Gg) = ts</a:t>
-            </a:r>
-          </a:p>
-        </p:txBody>
-      </p:sp>
-      <p:sp>
-        <p:nvSpPr>
-          <p:cNvPr id="14" name="text 12" descr="sci-ppt:obj-012"/>
+              <a:t>is the gel quasi-static over the event?</a:t>
+            </a:r>
+          </a:p>
+        </p:txBody>
+      </p:sp>
+      <p:sp>
+        <p:nvSpPr>
+          <p:cNvPr id="13" name="A-E23 text 11" descr="sci-ppt:o011"/>
           <p:cNvSpPr txBox="1"/>
           <p:nvPr/>
         </p:nvSpPr>
         <p:spPr>
           <a:xfrm>
-            <a:off x="365760" y="4233672"/>
-            <a:ext cx="8412480" cy="310896"/>
+            <a:off x="4343400" y="3749039"/>
+            <a:ext cx="3429000" cy="223900"/>
           </a:xfrm>
           <a:prstGeom prst="rect">
             <a:avLst/>
@@ -3570,38 +3538,70 @@
           <a:effectLst/>
         </p:spPr>
         <p:txBody>
-          <a:bodyPr wrap="none" lIns="0" rIns="0" tIns="0" bIns="0" anchor="ctr">
+          <a:bodyPr wrap="none" lIns="18288" rIns="18288" tIns="18288" bIns="18288" anchor="t">
             <a:spAutoFit/>
           </a:bodyPr>
           <a:lstStyle/>
           <a:p>
-            <a:pPr algn="l">
+            <a:pPr algn="ctr">
               <a:spcAft>
                 <a:spcPts val="0"/>
               </a:spcAft>
             </a:pPr>
             <a:r>
-              <a:rPr sz="1152" b="0" i="0">
+              <a:rPr sz="1150" b="0" i="0">
                 <a:solidFill>
-                  <a:srgbClr val="E7F0F3"/>
+                  <a:srgbClr val="B4C7D2"/>
                 </a:solidFill>
                 <a:latin typeface="Arial"/>
               </a:rPr>
-              <a:t>• μlLg²/(kpermMd) ≈ tporo</a:t>
-            </a:r>
-          </a:p>
-        </p:txBody>
-      </p:sp>
-      <p:sp>
-        <p:nvSpPr>
-          <p:cNvPr id="15" name="text 13" descr="sci-ppt:obj-013"/>
+              <a:t>inertia / wave travel</a:t>
+            </a:r>
+          </a:p>
+        </p:txBody>
+      </p:sp>
+      <p:sp>
+        <p:nvSpPr>
+          <p:cNvPr id="14" name="A-E23 round_rect 12" descr="sci-ppt:o012"/>
+          <p:cNvSpPr/>
+          <p:nvPr/>
+        </p:nvSpPr>
+        <p:spPr>
+          <a:xfrm>
+            <a:off x="8046720" y="1371600"/>
+            <a:ext cx="3611880" cy="3108960"/>
+          </a:xfrm>
+          <a:prstGeom prst="roundRect">
+            <a:avLst/>
+          </a:prstGeom>
+          <a:solidFill>
+            <a:srgbClr val="213E4B"/>
+          </a:solidFill>
+          <a:ln w="20320">
+            <a:solidFill>
+              <a:srgbClr val="F28BA0"/>
+            </a:solidFill>
+          </a:ln>
+          <a:effectLst/>
+        </p:spPr>
+        <p:txBody>
+          <a:bodyPr rtlCol="0" anchor="ctr"/>
+          <a:lstStyle/>
+          <a:p>
+            <a:pPr algn="ctr"/>
+          </a:p>
+        </p:txBody>
+      </p:sp>
+      <p:sp>
+        <p:nvSpPr>
+          <p:cNvPr id="15" name="A-E23 text 13" descr="sci-ppt:o013"/>
           <p:cNvSpPr txBox="1"/>
           <p:nvPr/>
         </p:nvSpPr>
         <p:spPr>
           <a:xfrm>
-            <a:off x="365760" y="4443984"/>
-            <a:ext cx="8412480" cy="310896"/>
+            <a:off x="8156448" y="1426464"/>
+            <a:ext cx="3392424" cy="254889"/>
           </a:xfrm>
           <a:prstGeom prst="rect">
             <a:avLst/>
@@ -3610,7 +3610,7 @@
           <a:effectLst/>
         </p:spPr>
         <p:txBody>
-          <a:bodyPr wrap="none" lIns="0" rIns="0" tIns="0" bIns="0" anchor="ctr">
+          <a:bodyPr wrap="none" lIns="18288" rIns="18288" tIns="18288" bIns="18288" anchor="t">
             <a:spAutoFit/>
           </a:bodyPr>
           <a:lstStyle/>
@@ -3621,27 +3621,27 @@
               </a:spcAft>
             </a:pPr>
             <a:r>
-              <a:rPr sz="1152" b="0" i="0">
+              <a:rPr sz="1350" b="1" i="0">
                 <a:solidFill>
-                  <a:srgbClr val="E7F0F3"/>
+                  <a:srgbClr val="F28BA0"/>
                 </a:solidFill>
                 <a:latin typeface="Arial"/>
               </a:rPr>
-              <a:t>Match material response to the transient event</a:t>
-            </a:r>
-          </a:p>
-        </p:txBody>
-      </p:sp>
-      <p:sp>
-        <p:nvSpPr>
-          <p:cNvPr id="16" name="text 14" descr="sci-ppt:obj-014"/>
+              <a:t>Drainage</a:t>
+            </a:r>
+          </a:p>
+        </p:txBody>
+      </p:sp>
+      <p:sp>
+        <p:nvSpPr>
+          <p:cNvPr id="16" name="A-E23 text 14" descr="sci-ppt:o014"/>
           <p:cNvSpPr txBox="1"/>
           <p:nvPr/>
         </p:nvSpPr>
         <p:spPr>
           <a:xfrm>
-            <a:off x="365760" y="4654296"/>
-            <a:ext cx="8412480" cy="310896"/>
+            <a:off x="8138160" y="1920240"/>
+            <a:ext cx="3429000" cy="231648"/>
           </a:xfrm>
           <a:prstGeom prst="rect">
             <a:avLst/>
@@ -3650,7 +3650,127 @@
           <a:effectLst/>
         </p:spPr>
         <p:txBody>
-          <a:bodyPr wrap="none" lIns="0" rIns="0" tIns="0" bIns="0" anchor="ctr">
+          <a:bodyPr wrap="none" lIns="18288" rIns="18288" tIns="18288" bIns="18288" anchor="t">
+            <a:spAutoFit/>
+          </a:bodyPr>
+          <a:lstStyle/>
+          <a:p>
+            <a:pPr algn="ctr">
+              <a:spcAft>
+                <a:spcPts val="0"/>
+              </a:spcAft>
+            </a:pPr>
+            <a:r>
+              <a:rPr sz="1200" b="1" i="0">
+                <a:solidFill>
+                  <a:srgbClr val="E7F0F3"/>
+                </a:solidFill>
+                <a:latin typeface="Arial"/>
+              </a:rPr>
+              <a:t>tₚₒᵣₒ ~ μₗ L_g² / (k M_d) = 1.5 s</a:t>
+            </a:r>
+          </a:p>
+        </p:txBody>
+      </p:sp>
+      <p:sp>
+        <p:nvSpPr>
+          <p:cNvPr id="17" name="A-E23 text 15" descr="sci-ppt:o015"/>
+          <p:cNvSpPr txBox="1"/>
+          <p:nvPr/>
+        </p:nvSpPr>
+        <p:spPr>
+          <a:xfrm>
+            <a:off x="8138160" y="2926080"/>
+            <a:ext cx="3429000" cy="231648"/>
+          </a:xfrm>
+          <a:prstGeom prst="rect">
+            <a:avLst/>
+          </a:prstGeom>
+          <a:noFill/>
+          <a:effectLst/>
+        </p:spPr>
+        <p:txBody>
+          <a:bodyPr wrap="none" lIns="18288" rIns="18288" tIns="18288" bIns="18288" anchor="t">
+            <a:spAutoFit/>
+          </a:bodyPr>
+          <a:lstStyle/>
+          <a:p>
+            <a:pPr algn="ctr">
+              <a:spcAft>
+                <a:spcPts val="0"/>
+              </a:spcAft>
+            </a:pPr>
+            <a:r>
+              <a:rPr sz="1200" b="0" i="0">
+                <a:solidFill>
+                  <a:srgbClr val="F2B880"/>
+                </a:solidFill>
+                <a:latin typeface="Arial"/>
+              </a:rPr>
+              <a:t>can solvent leave during the event?</a:t>
+            </a:r>
+          </a:p>
+        </p:txBody>
+      </p:sp>
+      <p:sp>
+        <p:nvSpPr>
+          <p:cNvPr id="18" name="A-E23 text 16" descr="sci-ppt:o016"/>
+          <p:cNvSpPr txBox="1"/>
+          <p:nvPr/>
+        </p:nvSpPr>
+        <p:spPr>
+          <a:xfrm>
+            <a:off x="8138160" y="3749039"/>
+            <a:ext cx="3429000" cy="223900"/>
+          </a:xfrm>
+          <a:prstGeom prst="rect">
+            <a:avLst/>
+          </a:prstGeom>
+          <a:noFill/>
+          <a:effectLst/>
+        </p:spPr>
+        <p:txBody>
+          <a:bodyPr wrap="none" lIns="18288" rIns="18288" tIns="18288" bIns="18288" anchor="t">
+            <a:spAutoFit/>
+          </a:bodyPr>
+          <a:lstStyle/>
+          <a:p>
+            <a:pPr algn="ctr">
+              <a:spcAft>
+                <a:spcPts val="0"/>
+              </a:spcAft>
+            </a:pPr>
+            <a:r>
+              <a:rPr sz="1150" b="0" i="0">
+                <a:solidFill>
+                  <a:srgbClr val="B4C7D2"/>
+                </a:solidFill>
+                <a:latin typeface="Arial"/>
+              </a:rPr>
+              <a:t>poroelastic transport</a:t>
+            </a:r>
+          </a:p>
+        </p:txBody>
+      </p:sp>
+      <p:sp>
+        <p:nvSpPr>
+          <p:cNvPr id="19" name="A-E23 text 17" descr="sci-ppt:o017"/>
+          <p:cNvSpPr txBox="1"/>
+          <p:nvPr/>
+        </p:nvSpPr>
+        <p:spPr>
+          <a:xfrm>
+            <a:off x="457200" y="4846320"/>
+            <a:ext cx="11247120" cy="239395"/>
+          </a:xfrm>
+          <a:prstGeom prst="rect">
+            <a:avLst/>
+          </a:prstGeom>
+          <a:noFill/>
+          <a:effectLst/>
+        </p:spPr>
+        <p:txBody>
+          <a:bodyPr wrap="none" lIns="18288" rIns="18288" tIns="18288" bIns="18288" anchor="t">
             <a:spAutoFit/>
           </a:bodyPr>
           <a:lstStyle/>
@@ -3661,13 +3781,53 @@
               </a:spcAft>
             </a:pPr>
             <a:r>
-              <a:rPr sz="1152" b="0" i="0">
+              <a:rPr sz="1250" b="0" i="0">
                 <a:solidFill>
                   <a:srgbClr val="E7F0F3"/>
                 </a:solidFill>
                 <a:latin typeface="Arial"/>
               </a:rPr>
-              <a:t>Do not substitute slow stiffness for every rate</a:t>
+              <a:t>Each ratio against the event time constrains a different physical assumption; one passing test does not cover the others.</a:t>
+            </a:r>
+          </a:p>
+        </p:txBody>
+      </p:sp>
+      <p:sp>
+        <p:nvSpPr>
+          <p:cNvPr id="20" name="A-E23 text 18" descr="sci-ppt:o018"/>
+          <p:cNvSpPr txBox="1"/>
+          <p:nvPr/>
+        </p:nvSpPr>
+        <p:spPr>
+          <a:xfrm>
+            <a:off x="320040" y="6510528"/>
+            <a:ext cx="11521440" cy="200660"/>
+          </a:xfrm>
+          <a:prstGeom prst="rect">
+            <a:avLst/>
+          </a:prstGeom>
+          <a:noFill/>
+          <a:effectLst/>
+        </p:spPr>
+        <p:txBody>
+          <a:bodyPr wrap="none" lIns="18288" rIns="18288" tIns="18288" bIns="18288" anchor="t">
+            <a:spAutoFit/>
+          </a:bodyPr>
+          <a:lstStyle/>
+          <a:p>
+            <a:pPr algn="l">
+              <a:spcAft>
+                <a:spcPts val="0"/>
+              </a:spcAft>
+            </a:pPr>
+            <a:r>
+              <a:rPr sz="1000" b="0" i="0">
+                <a:solidFill>
+                  <a:srgbClr val="B4C7D2"/>
+                </a:solidFill>
+                <a:latin typeface="Arial"/>
+              </a:rPr>
+              <a:t>Original event-response formulas recalled: Eqs. A-E16, A-E18, A-E20 (Defence 3).</a:t>
             </a:r>
           </a:p>
         </p:txBody>
